--- a/prezentacie/t21w.pptx
+++ b/prezentacie/t21w.pptx
@@ -259,7 +259,7 @@
           <a:p>
             <a:fld id="{10052495-8BC8-4CFB-94B1-B0429F101A0D}" type="datetimeFigureOut">
               <a:rPr lang="sk-SK" smtClean="0"/>
-              <a:t>6. 2. 2026</a:t>
+              <a:t>24. 2. 2026</a:t>
             </a:fld>
             <a:endParaRPr lang="sk-SK"/>
           </a:p>
@@ -429,7 +429,7 @@
           <a:p>
             <a:fld id="{10052495-8BC8-4CFB-94B1-B0429F101A0D}" type="datetimeFigureOut">
               <a:rPr lang="sk-SK" smtClean="0"/>
-              <a:t>6. 2. 2026</a:t>
+              <a:t>24. 2. 2026</a:t>
             </a:fld>
             <a:endParaRPr lang="sk-SK"/>
           </a:p>
@@ -609,7 +609,7 @@
           <a:p>
             <a:fld id="{10052495-8BC8-4CFB-94B1-B0429F101A0D}" type="datetimeFigureOut">
               <a:rPr lang="sk-SK" smtClean="0"/>
-              <a:t>6. 2. 2026</a:t>
+              <a:t>24. 2. 2026</a:t>
             </a:fld>
             <a:endParaRPr lang="sk-SK"/>
           </a:p>
@@ -779,7 +779,7 @@
           <a:p>
             <a:fld id="{10052495-8BC8-4CFB-94B1-B0429F101A0D}" type="datetimeFigureOut">
               <a:rPr lang="sk-SK" smtClean="0"/>
-              <a:t>6. 2. 2026</a:t>
+              <a:t>24. 2. 2026</a:t>
             </a:fld>
             <a:endParaRPr lang="sk-SK"/>
           </a:p>
@@ -1025,7 +1025,7 @@
           <a:p>
             <a:fld id="{10052495-8BC8-4CFB-94B1-B0429F101A0D}" type="datetimeFigureOut">
               <a:rPr lang="sk-SK" smtClean="0"/>
-              <a:t>6. 2. 2026</a:t>
+              <a:t>24. 2. 2026</a:t>
             </a:fld>
             <a:endParaRPr lang="sk-SK"/>
           </a:p>
@@ -1257,7 +1257,7 @@
           <a:p>
             <a:fld id="{10052495-8BC8-4CFB-94B1-B0429F101A0D}" type="datetimeFigureOut">
               <a:rPr lang="sk-SK" smtClean="0"/>
-              <a:t>6. 2. 2026</a:t>
+              <a:t>24. 2. 2026</a:t>
             </a:fld>
             <a:endParaRPr lang="sk-SK"/>
           </a:p>
@@ -1624,7 +1624,7 @@
           <a:p>
             <a:fld id="{10052495-8BC8-4CFB-94B1-B0429F101A0D}" type="datetimeFigureOut">
               <a:rPr lang="sk-SK" smtClean="0"/>
-              <a:t>6. 2. 2026</a:t>
+              <a:t>24. 2. 2026</a:t>
             </a:fld>
             <a:endParaRPr lang="sk-SK"/>
           </a:p>
@@ -1742,7 +1742,7 @@
           <a:p>
             <a:fld id="{10052495-8BC8-4CFB-94B1-B0429F101A0D}" type="datetimeFigureOut">
               <a:rPr lang="sk-SK" smtClean="0"/>
-              <a:t>6. 2. 2026</a:t>
+              <a:t>24. 2. 2026</a:t>
             </a:fld>
             <a:endParaRPr lang="sk-SK"/>
           </a:p>
@@ -1837,7 +1837,7 @@
           <a:p>
             <a:fld id="{10052495-8BC8-4CFB-94B1-B0429F101A0D}" type="datetimeFigureOut">
               <a:rPr lang="sk-SK" smtClean="0"/>
-              <a:t>6. 2. 2026</a:t>
+              <a:t>24. 2. 2026</a:t>
             </a:fld>
             <a:endParaRPr lang="sk-SK"/>
           </a:p>
@@ -2114,7 +2114,7 @@
           <a:p>
             <a:fld id="{10052495-8BC8-4CFB-94B1-B0429F101A0D}" type="datetimeFigureOut">
               <a:rPr lang="sk-SK" smtClean="0"/>
-              <a:t>6. 2. 2026</a:t>
+              <a:t>24. 2. 2026</a:t>
             </a:fld>
             <a:endParaRPr lang="sk-SK"/>
           </a:p>
@@ -2371,7 +2371,7 @@
           <a:p>
             <a:fld id="{10052495-8BC8-4CFB-94B1-B0429F101A0D}" type="datetimeFigureOut">
               <a:rPr lang="sk-SK" smtClean="0"/>
-              <a:t>6. 2. 2026</a:t>
+              <a:t>24. 2. 2026</a:t>
             </a:fld>
             <a:endParaRPr lang="sk-SK"/>
           </a:p>
@@ -2584,7 +2584,7 @@
           <a:p>
             <a:fld id="{10052495-8BC8-4CFB-94B1-B0429F101A0D}" type="datetimeFigureOut">
               <a:rPr lang="sk-SK" smtClean="0"/>
-              <a:t>6. 2. 2026</a:t>
+              <a:t>24. 2. 2026</a:t>
             </a:fld>
             <a:endParaRPr lang="sk-SK"/>
           </a:p>
@@ -3510,7 +3510,15 @@
             </a:br>
             <a:r>
               <a:rPr lang="sk-SK" b="1" dirty="0"/>
-              <a:t>Ing. Jozef Wagner PhD.</a:t>
+              <a:t>Ing. Jozef Wagner</a:t>
+            </a:r>
+            <a:r>
+              <a:rPr lang="en-US" b="1" dirty="0"/>
+              <a:t>,</a:t>
+            </a:r>
+            <a:r>
+              <a:rPr lang="sk-SK" b="1" dirty="0"/>
+              <a:t> PhD.</a:t>
             </a:r>
           </a:p>
           <a:p>
@@ -7767,7 +7775,19 @@
             </a:r>
             <a:r>
               <a:rPr lang="sk-SK" dirty="0"/>
-              <a:t> - rozmiestni prvky horizontálne v jednom stĺpci pod sebou.</a:t>
+              <a:t> - rozmiestni prvky </a:t>
+            </a:r>
+            <a:r>
+              <a:rPr lang="en-US" dirty="0" err="1"/>
+              <a:t>vertik</a:t>
+            </a:r>
+            <a:r>
+              <a:rPr lang="sk-SK" dirty="0" err="1"/>
+              <a:t>álne</a:t>
+            </a:r>
+            <a:r>
+              <a:rPr lang="sk-SK" dirty="0"/>
+              <a:t> v jednom stĺpci pod sebou.</a:t>
             </a:r>
           </a:p>
           <a:p>
